--- a/week05/Lecture05.pptx
+++ b/week05/Lecture05.pptx
@@ -223,7 +223,7 @@
           <a:p>
             <a:fld id="{634F3F22-B4BB-3F48-9180-464A9F2D66D1}" type="datetimeFigureOut">
               <a:rPr kumimoji="1" lang="zh-CN" altLang="en-US" smtClean="0"/>
-              <a:t>2025/3/16</a:t>
+              <a:t>2026/3/29</a:t>
             </a:fld>
             <a:endParaRPr kumimoji="1" lang="zh-CN" altLang="en-US"/>
           </a:p>
@@ -703,7 +703,7 @@
           <a:p>
             <a:fld id="{FC19A4FA-3D9A-4114-B0D5-759CBD56F1AB}" type="datetimeFigureOut">
               <a:rPr lang="zh-CN" altLang="en-US" smtClean="0"/>
-              <a:t>2025/3/16</a:t>
+              <a:t>2026/3/29</a:t>
             </a:fld>
             <a:endParaRPr lang="zh-CN" altLang="en-US"/>
           </a:p>
@@ -906,7 +906,7 @@
           <a:p>
             <a:fld id="{FC19A4FA-3D9A-4114-B0D5-759CBD56F1AB}" type="datetimeFigureOut">
               <a:rPr lang="zh-CN" altLang="en-US" smtClean="0"/>
-              <a:t>2025/3/16</a:t>
+              <a:t>2026/3/29</a:t>
             </a:fld>
             <a:endParaRPr lang="zh-CN" altLang="en-US"/>
           </a:p>
@@ -1084,7 +1084,7 @@
           <a:p>
             <a:fld id="{FC19A4FA-3D9A-4114-B0D5-759CBD56F1AB}" type="datetimeFigureOut">
               <a:rPr lang="zh-CN" altLang="en-US" smtClean="0"/>
-              <a:t>2025/3/16</a:t>
+              <a:t>2026/3/29</a:t>
             </a:fld>
             <a:endParaRPr lang="zh-CN" altLang="en-US"/>
           </a:p>
@@ -1308,7 +1308,7 @@
           <a:p>
             <a:fld id="{FC19A4FA-3D9A-4114-B0D5-759CBD56F1AB}" type="datetimeFigureOut">
               <a:rPr lang="zh-CN" altLang="en-US" smtClean="0"/>
-              <a:t>2025/3/16</a:t>
+              <a:t>2026/3/29</a:t>
             </a:fld>
             <a:endParaRPr lang="zh-CN" altLang="en-US"/>
           </a:p>
@@ -1542,7 +1542,7 @@
           <a:p>
             <a:fld id="{FC19A4FA-3D9A-4114-B0D5-759CBD56F1AB}" type="datetimeFigureOut">
               <a:rPr lang="zh-CN" altLang="en-US" smtClean="0"/>
-              <a:t>2025/3/16</a:t>
+              <a:t>2026/3/29</a:t>
             </a:fld>
             <a:endParaRPr lang="zh-CN" altLang="en-US"/>
           </a:p>
@@ -1941,7 +1941,7 @@
           <a:p>
             <a:fld id="{FC19A4FA-3D9A-4114-B0D5-759CBD56F1AB}" type="datetimeFigureOut">
               <a:rPr lang="zh-CN" altLang="en-US" smtClean="0"/>
-              <a:t>2025/3/16</a:t>
+              <a:t>2026/3/29</a:t>
             </a:fld>
             <a:endParaRPr lang="zh-CN" altLang="en-US"/>
           </a:p>
@@ -2221,7 +2221,7 @@
           <a:p>
             <a:fld id="{FC19A4FA-3D9A-4114-B0D5-759CBD56F1AB}" type="datetimeFigureOut">
               <a:rPr lang="zh-CN" altLang="en-US" smtClean="0"/>
-              <a:t>2025/3/16</a:t>
+              <a:t>2026/3/29</a:t>
             </a:fld>
             <a:endParaRPr lang="zh-CN" altLang="en-US"/>
           </a:p>
@@ -2373,7 +2373,7 @@
           <a:p>
             <a:fld id="{FC19A4FA-3D9A-4114-B0D5-759CBD56F1AB}" type="datetimeFigureOut">
               <a:rPr lang="zh-CN" altLang="en-US" smtClean="0"/>
-              <a:t>2025/3/16</a:t>
+              <a:t>2026/3/29</a:t>
             </a:fld>
             <a:endParaRPr lang="zh-CN" altLang="en-US"/>
           </a:p>
@@ -2503,7 +2503,7 @@
           <a:p>
             <a:fld id="{FC19A4FA-3D9A-4114-B0D5-759CBD56F1AB}" type="datetimeFigureOut">
               <a:rPr lang="zh-CN" altLang="en-US" smtClean="0"/>
-              <a:t>2025/3/16</a:t>
+              <a:t>2026/3/29</a:t>
             </a:fld>
             <a:endParaRPr lang="zh-CN" altLang="en-US"/>
           </a:p>
@@ -2813,7 +2813,7 @@
           <a:p>
             <a:fld id="{FC19A4FA-3D9A-4114-B0D5-759CBD56F1AB}" type="datetimeFigureOut">
               <a:rPr lang="zh-CN" altLang="en-US" smtClean="0"/>
-              <a:t>2025/3/16</a:t>
+              <a:t>2026/3/29</a:t>
             </a:fld>
             <a:endParaRPr lang="zh-CN" altLang="en-US"/>
           </a:p>
@@ -3100,7 +3100,7 @@
           <a:p>
             <a:fld id="{FC19A4FA-3D9A-4114-B0D5-759CBD56F1AB}" type="datetimeFigureOut">
               <a:rPr lang="zh-CN" altLang="en-US" smtClean="0"/>
-              <a:t>2025/3/16</a:t>
+              <a:t>2026/3/29</a:t>
             </a:fld>
             <a:endParaRPr lang="zh-CN" altLang="en-US"/>
           </a:p>
@@ -3393,7 +3393,7 @@
           <a:p>
             <a:fld id="{FC19A4FA-3D9A-4114-B0D5-759CBD56F1AB}" type="datetimeFigureOut">
               <a:rPr lang="zh-CN" altLang="en-US" smtClean="0"/>
-              <a:t>2025/3/16</a:t>
+              <a:t>2026/3/29</a:t>
             </a:fld>
             <a:endParaRPr lang="zh-CN" altLang="en-US"/>
           </a:p>
@@ -11134,28 +11134,28 @@
           <a:custGeom>
             <a:avLst/>
             <a:gdLst>
-              <a:gd name="connsiteX0" fmla="*/ 0 w 2227730"/>
-              <a:gd name="connsiteY0" fmla="*/ 1250584 h 1250584"/>
-              <a:gd name="connsiteX1" fmla="*/ 1286706 w 2227730"/>
-              <a:gd name="connsiteY1" fmla="*/ 919970 h 1250584"/>
-              <a:gd name="connsiteX2" fmla="*/ 2227730 w 2227730"/>
-              <a:gd name="connsiteY2" fmla="*/ 0 h 1250584"/>
-              <a:gd name="connsiteX3" fmla="*/ 2227730 w 2227730"/>
-              <a:gd name="connsiteY3" fmla="*/ 0 h 1250584"/>
+              <a:gd name="csX0" fmla="*/ 0 w 2227730"/>
+              <a:gd name="csY0" fmla="*/ 1250584 h 1250584"/>
+              <a:gd name="csX1" fmla="*/ 1286706 w 2227730"/>
+              <a:gd name="csY1" fmla="*/ 919970 h 1250584"/>
+              <a:gd name="csX2" fmla="*/ 2227730 w 2227730"/>
+              <a:gd name="csY2" fmla="*/ 0 h 1250584"/>
+              <a:gd name="csX3" fmla="*/ 2227730 w 2227730"/>
+              <a:gd name="csY3" fmla="*/ 0 h 1250584"/>
             </a:gdLst>
             <a:ahLst/>
             <a:cxnLst>
               <a:cxn ang="0">
-                <a:pos x="connsiteX0" y="connsiteY0"/>
+                <a:pos x="csX0" y="csY0"/>
               </a:cxn>
               <a:cxn ang="0">
-                <a:pos x="connsiteX1" y="connsiteY1"/>
+                <a:pos x="csX1" y="csY1"/>
               </a:cxn>
               <a:cxn ang="0">
-                <a:pos x="connsiteX2" y="connsiteY2"/>
+                <a:pos x="csX2" y="csY2"/>
               </a:cxn>
               <a:cxn ang="0">
-                <a:pos x="connsiteX3" y="connsiteY3"/>
+                <a:pos x="csX3" y="csY3"/>
               </a:cxn>
             </a:cxnLst>
             <a:rect l="l" t="t" r="r" b="b"/>
@@ -11292,28 +11292,28 @@
           <a:custGeom>
             <a:avLst/>
             <a:gdLst>
-              <a:gd name="connsiteX0" fmla="*/ 0 w 2277626"/>
-              <a:gd name="connsiteY0" fmla="*/ 1169894 h 1169894"/>
-              <a:gd name="connsiteX1" fmla="*/ 1315526 w 2277626"/>
-              <a:gd name="connsiteY1" fmla="*/ 860612 h 1169894"/>
-              <a:gd name="connsiteX2" fmla="*/ 2277626 w 2277626"/>
-              <a:gd name="connsiteY2" fmla="*/ 0 h 1169894"/>
-              <a:gd name="connsiteX3" fmla="*/ 2277626 w 2277626"/>
-              <a:gd name="connsiteY3" fmla="*/ 0 h 1169894"/>
+              <a:gd name="csX0" fmla="*/ 0 w 2277626"/>
+              <a:gd name="csY0" fmla="*/ 1169894 h 1169894"/>
+              <a:gd name="csX1" fmla="*/ 1315526 w 2277626"/>
+              <a:gd name="csY1" fmla="*/ 860612 h 1169894"/>
+              <a:gd name="csX2" fmla="*/ 2277626 w 2277626"/>
+              <a:gd name="csY2" fmla="*/ 0 h 1169894"/>
+              <a:gd name="csX3" fmla="*/ 2277626 w 2277626"/>
+              <a:gd name="csY3" fmla="*/ 0 h 1169894"/>
             </a:gdLst>
             <a:ahLst/>
             <a:cxnLst>
               <a:cxn ang="0">
-                <a:pos x="connsiteX0" y="connsiteY0"/>
+                <a:pos x="csX0" y="csY0"/>
               </a:cxn>
               <a:cxn ang="0">
-                <a:pos x="connsiteX1" y="connsiteY1"/>
+                <a:pos x="csX1" y="csY1"/>
               </a:cxn>
               <a:cxn ang="0">
-                <a:pos x="connsiteX2" y="connsiteY2"/>
+                <a:pos x="csX2" y="csY2"/>
               </a:cxn>
               <a:cxn ang="0">
-                <a:pos x="connsiteX3" y="connsiteY3"/>
+                <a:pos x="csX3" y="csY3"/>
               </a:cxn>
             </a:cxnLst>
             <a:rect l="l" t="t" r="r" b="b"/>
@@ -11450,28 +11450,28 @@
           <a:custGeom>
             <a:avLst/>
             <a:gdLst>
-              <a:gd name="connsiteX0" fmla="*/ 0 w 2227728"/>
-              <a:gd name="connsiteY0" fmla="*/ 954594 h 954594"/>
-              <a:gd name="connsiteX1" fmla="*/ 1286705 w 2227728"/>
-              <a:gd name="connsiteY1" fmla="*/ 702230 h 954594"/>
-              <a:gd name="connsiteX2" fmla="*/ 2227728 w 2227728"/>
-              <a:gd name="connsiteY2" fmla="*/ 0 h 954594"/>
-              <a:gd name="connsiteX3" fmla="*/ 2227728 w 2227728"/>
-              <a:gd name="connsiteY3" fmla="*/ 0 h 954594"/>
+              <a:gd name="csX0" fmla="*/ 0 w 2227728"/>
+              <a:gd name="csY0" fmla="*/ 954594 h 954594"/>
+              <a:gd name="csX1" fmla="*/ 1286705 w 2227728"/>
+              <a:gd name="csY1" fmla="*/ 702230 h 954594"/>
+              <a:gd name="csX2" fmla="*/ 2227728 w 2227728"/>
+              <a:gd name="csY2" fmla="*/ 0 h 954594"/>
+              <a:gd name="csX3" fmla="*/ 2227728 w 2227728"/>
+              <a:gd name="csY3" fmla="*/ 0 h 954594"/>
             </a:gdLst>
             <a:ahLst/>
             <a:cxnLst>
               <a:cxn ang="0">
-                <a:pos x="connsiteX0" y="connsiteY0"/>
+                <a:pos x="csX0" y="csY0"/>
               </a:cxn>
               <a:cxn ang="0">
-                <a:pos x="connsiteX1" y="connsiteY1"/>
+                <a:pos x="csX1" y="csY1"/>
               </a:cxn>
               <a:cxn ang="0">
-                <a:pos x="connsiteX2" y="connsiteY2"/>
+                <a:pos x="csX2" y="csY2"/>
               </a:cxn>
               <a:cxn ang="0">
-                <a:pos x="connsiteX3" y="connsiteY3"/>
+                <a:pos x="csX3" y="csY3"/>
               </a:cxn>
             </a:cxnLst>
             <a:rect l="l" t="t" r="r" b="b"/>
@@ -11608,28 +11608,28 @@
           <a:custGeom>
             <a:avLst/>
             <a:gdLst>
-              <a:gd name="connsiteX0" fmla="*/ 0 w 2443308"/>
-              <a:gd name="connsiteY0" fmla="*/ 870792 h 870792"/>
-              <a:gd name="connsiteX1" fmla="*/ 1411221 w 2443308"/>
-              <a:gd name="connsiteY1" fmla="*/ 640582 h 870792"/>
-              <a:gd name="connsiteX2" fmla="*/ 2443308 w 2443308"/>
-              <a:gd name="connsiteY2" fmla="*/ 0 h 870792"/>
-              <a:gd name="connsiteX3" fmla="*/ 2443308 w 2443308"/>
-              <a:gd name="connsiteY3" fmla="*/ 0 h 870792"/>
+              <a:gd name="csX0" fmla="*/ 0 w 2443308"/>
+              <a:gd name="csY0" fmla="*/ 870792 h 870792"/>
+              <a:gd name="csX1" fmla="*/ 1411221 w 2443308"/>
+              <a:gd name="csY1" fmla="*/ 640582 h 870792"/>
+              <a:gd name="csX2" fmla="*/ 2443308 w 2443308"/>
+              <a:gd name="csY2" fmla="*/ 0 h 870792"/>
+              <a:gd name="csX3" fmla="*/ 2443308 w 2443308"/>
+              <a:gd name="csY3" fmla="*/ 0 h 870792"/>
             </a:gdLst>
             <a:ahLst/>
             <a:cxnLst>
               <a:cxn ang="0">
-                <a:pos x="connsiteX0" y="connsiteY0"/>
+                <a:pos x="csX0" y="csY0"/>
               </a:cxn>
               <a:cxn ang="0">
-                <a:pos x="connsiteX1" y="connsiteY1"/>
+                <a:pos x="csX1" y="csY1"/>
               </a:cxn>
               <a:cxn ang="0">
-                <a:pos x="connsiteX2" y="connsiteY2"/>
+                <a:pos x="csX2" y="csY2"/>
               </a:cxn>
               <a:cxn ang="0">
-                <a:pos x="connsiteX3" y="connsiteY3"/>
+                <a:pos x="csX3" y="csY3"/>
               </a:cxn>
             </a:cxnLst>
             <a:rect l="l" t="t" r="r" b="b"/>
@@ -16882,28 +16882,28 @@
           <a:custGeom>
             <a:avLst/>
             <a:gdLst>
-              <a:gd name="connsiteX0" fmla="*/ 0 w 2227730"/>
-              <a:gd name="connsiteY0" fmla="*/ 475421 h 475421"/>
-              <a:gd name="connsiteX1" fmla="*/ 1286706 w 2227730"/>
-              <a:gd name="connsiteY1" fmla="*/ 349735 h 475421"/>
-              <a:gd name="connsiteX2" fmla="*/ 2227730 w 2227730"/>
-              <a:gd name="connsiteY2" fmla="*/ 0 h 475421"/>
-              <a:gd name="connsiteX3" fmla="*/ 2227730 w 2227730"/>
-              <a:gd name="connsiteY3" fmla="*/ 0 h 475421"/>
+              <a:gd name="csX0" fmla="*/ 0 w 2227730"/>
+              <a:gd name="csY0" fmla="*/ 475421 h 475421"/>
+              <a:gd name="csX1" fmla="*/ 1286706 w 2227730"/>
+              <a:gd name="csY1" fmla="*/ 349735 h 475421"/>
+              <a:gd name="csX2" fmla="*/ 2227730 w 2227730"/>
+              <a:gd name="csY2" fmla="*/ 0 h 475421"/>
+              <a:gd name="csX3" fmla="*/ 2227730 w 2227730"/>
+              <a:gd name="csY3" fmla="*/ 0 h 475421"/>
             </a:gdLst>
             <a:ahLst/>
             <a:cxnLst>
               <a:cxn ang="0">
-                <a:pos x="connsiteX0" y="connsiteY0"/>
+                <a:pos x="csX0" y="csY0"/>
               </a:cxn>
               <a:cxn ang="0">
-                <a:pos x="connsiteX1" y="connsiteY1"/>
+                <a:pos x="csX1" y="csY1"/>
               </a:cxn>
               <a:cxn ang="0">
-                <a:pos x="connsiteX2" y="connsiteY2"/>
+                <a:pos x="csX2" y="csY2"/>
               </a:cxn>
               <a:cxn ang="0">
-                <a:pos x="connsiteX3" y="connsiteY3"/>
+                <a:pos x="csX3" y="csY3"/>
               </a:cxn>
             </a:cxnLst>
             <a:rect l="l" t="t" r="r" b="b"/>
@@ -17040,28 +17040,28 @@
           <a:custGeom>
             <a:avLst/>
             <a:gdLst>
-              <a:gd name="connsiteX0" fmla="*/ 0 w 2227730"/>
-              <a:gd name="connsiteY0" fmla="*/ 1308629 h 1308629"/>
-              <a:gd name="connsiteX1" fmla="*/ 1286706 w 2227730"/>
-              <a:gd name="connsiteY1" fmla="*/ 962669 h 1308629"/>
-              <a:gd name="connsiteX2" fmla="*/ 2227730 w 2227730"/>
-              <a:gd name="connsiteY2" fmla="*/ 0 h 1308629"/>
-              <a:gd name="connsiteX3" fmla="*/ 2227730 w 2227730"/>
-              <a:gd name="connsiteY3" fmla="*/ 0 h 1308629"/>
+              <a:gd name="csX0" fmla="*/ 0 w 2227730"/>
+              <a:gd name="csY0" fmla="*/ 1308629 h 1308629"/>
+              <a:gd name="csX1" fmla="*/ 1286706 w 2227730"/>
+              <a:gd name="csY1" fmla="*/ 962669 h 1308629"/>
+              <a:gd name="csX2" fmla="*/ 2227730 w 2227730"/>
+              <a:gd name="csY2" fmla="*/ 0 h 1308629"/>
+              <a:gd name="csX3" fmla="*/ 2227730 w 2227730"/>
+              <a:gd name="csY3" fmla="*/ 0 h 1308629"/>
             </a:gdLst>
             <a:ahLst/>
             <a:cxnLst>
               <a:cxn ang="0">
-                <a:pos x="connsiteX0" y="connsiteY0"/>
+                <a:pos x="csX0" y="csY0"/>
               </a:cxn>
               <a:cxn ang="0">
-                <a:pos x="connsiteX1" y="connsiteY1"/>
+                <a:pos x="csX1" y="csY1"/>
               </a:cxn>
               <a:cxn ang="0">
-                <a:pos x="connsiteX2" y="connsiteY2"/>
+                <a:pos x="csX2" y="csY2"/>
               </a:cxn>
               <a:cxn ang="0">
-                <a:pos x="connsiteX3" y="connsiteY3"/>
+                <a:pos x="csX3" y="csY3"/>
               </a:cxn>
             </a:cxnLst>
             <a:rect l="l" t="t" r="r" b="b"/>
@@ -29360,7 +29360,7 @@
         <p:spPr>
           <a:xfrm>
             <a:off x="1191491" y="471055"/>
-            <a:ext cx="2908297" cy="923330"/>
+            <a:ext cx="3749873" cy="923330"/>
           </a:xfrm>
           <a:prstGeom prst="rect">
             <a:avLst/>
@@ -29382,7 +29382,7 @@
                 </a:solidFill>
                 <a:cs typeface="Arial" panose="020B0604020202020204" pitchFamily="34" charset="0"/>
               </a:rPr>
-              <a:t>I love C++</a:t>
+              <a:t>I love C&amp;C++</a:t>
             </a:r>
             <a:endParaRPr kumimoji="1" lang="zh-CN" altLang="en-US" sz="5400" dirty="0">
               <a:solidFill>
@@ -32970,33 +32970,33 @@
           <a:custGeom>
             <a:avLst/>
             <a:gdLst>
-              <a:gd name="connsiteX0" fmla="*/ 1452262 w 1898713"/>
-              <a:gd name="connsiteY0" fmla="*/ 133185 h 1754325"/>
-              <a:gd name="connsiteX1" fmla="*/ 1898712 w 1898713"/>
-              <a:gd name="connsiteY1" fmla="*/ 878498 h 1754325"/>
-              <a:gd name="connsiteX2" fmla="*/ 1450069 w 1898713"/>
-              <a:gd name="connsiteY2" fmla="*/ 1622404 h 1754325"/>
-              <a:gd name="connsiteX3" fmla="*/ 949357 w 1898713"/>
-              <a:gd name="connsiteY3" fmla="*/ 877163 h 1754325"/>
-              <a:gd name="connsiteX4" fmla="*/ 1452262 w 1898713"/>
-              <a:gd name="connsiteY4" fmla="*/ 133185 h 1754325"/>
-              <a:gd name="connsiteX0" fmla="*/ 1452262 w 1898713"/>
-              <a:gd name="connsiteY0" fmla="*/ 133185 h 1754325"/>
-              <a:gd name="connsiteX1" fmla="*/ 1898712 w 1898713"/>
-              <a:gd name="connsiteY1" fmla="*/ 878498 h 1754325"/>
-              <a:gd name="connsiteX2" fmla="*/ 1450069 w 1898713"/>
-              <a:gd name="connsiteY2" fmla="*/ 1622404 h 1754325"/>
+              <a:gd name="csX0" fmla="*/ 1452262 w 1898713"/>
+              <a:gd name="csY0" fmla="*/ 133185 h 1754325"/>
+              <a:gd name="csX1" fmla="*/ 1898712 w 1898713"/>
+              <a:gd name="csY1" fmla="*/ 878498 h 1754325"/>
+              <a:gd name="csX2" fmla="*/ 1450069 w 1898713"/>
+              <a:gd name="csY2" fmla="*/ 1622404 h 1754325"/>
+              <a:gd name="csX3" fmla="*/ 949357 w 1898713"/>
+              <a:gd name="csY3" fmla="*/ 877163 h 1754325"/>
+              <a:gd name="csX4" fmla="*/ 1452262 w 1898713"/>
+              <a:gd name="csY4" fmla="*/ 133185 h 1754325"/>
+              <a:gd name="csX0" fmla="*/ 1452262 w 1898713"/>
+              <a:gd name="csY0" fmla="*/ 133185 h 1754325"/>
+              <a:gd name="csX1" fmla="*/ 1898712 w 1898713"/>
+              <a:gd name="csY1" fmla="*/ 878498 h 1754325"/>
+              <a:gd name="csX2" fmla="*/ 1450069 w 1898713"/>
+              <a:gd name="csY2" fmla="*/ 1622404 h 1754325"/>
             </a:gdLst>
             <a:ahLst/>
             <a:cxnLst>
               <a:cxn ang="0">
-                <a:pos x="connsiteX0" y="connsiteY0"/>
+                <a:pos x="csX0" y="csY0"/>
               </a:cxn>
               <a:cxn ang="0">
-                <a:pos x="connsiteX1" y="connsiteY1"/>
+                <a:pos x="csX1" y="csY1"/>
               </a:cxn>
               <a:cxn ang="0">
-                <a:pos x="connsiteX2" y="connsiteY2"/>
+                <a:pos x="csX2" y="csY2"/>
               </a:cxn>
             </a:cxnLst>
             <a:rect l="l" t="t" r="r" b="b"/>
@@ -33125,40 +33125,40 @@
           <a:custGeom>
             <a:avLst/>
             <a:gdLst>
-              <a:gd name="connsiteX0" fmla="*/ 1086545 w 2456533"/>
-              <a:gd name="connsiteY0" fmla="*/ 8257 h 2472571"/>
-              <a:gd name="connsiteX1" fmla="*/ 2262820 w 2456533"/>
-              <a:gd name="connsiteY1" fmla="*/ 569892 h 2472571"/>
-              <a:gd name="connsiteX2" fmla="*/ 2282809 w 2456533"/>
-              <a:gd name="connsiteY2" fmla="*/ 1870143 h 2472571"/>
-              <a:gd name="connsiteX3" fmla="*/ 1124714 w 2456533"/>
-              <a:gd name="connsiteY3" fmla="*/ 2468170 h 2472571"/>
-              <a:gd name="connsiteX4" fmla="*/ 1228267 w 2456533"/>
-              <a:gd name="connsiteY4" fmla="*/ 1236286 h 2472571"/>
-              <a:gd name="connsiteX5" fmla="*/ 1086545 w 2456533"/>
-              <a:gd name="connsiteY5" fmla="*/ 8257 h 2472571"/>
-              <a:gd name="connsiteX0" fmla="*/ 1086545 w 2456533"/>
-              <a:gd name="connsiteY0" fmla="*/ 8257 h 2472571"/>
-              <a:gd name="connsiteX1" fmla="*/ 2262820 w 2456533"/>
-              <a:gd name="connsiteY1" fmla="*/ 569892 h 2472571"/>
-              <a:gd name="connsiteX2" fmla="*/ 2282809 w 2456533"/>
-              <a:gd name="connsiteY2" fmla="*/ 1870143 h 2472571"/>
-              <a:gd name="connsiteX3" fmla="*/ 1124714 w 2456533"/>
-              <a:gd name="connsiteY3" fmla="*/ 2468170 h 2472571"/>
+              <a:gd name="csX0" fmla="*/ 1086545 w 2456533"/>
+              <a:gd name="csY0" fmla="*/ 8257 h 2472571"/>
+              <a:gd name="csX1" fmla="*/ 2262820 w 2456533"/>
+              <a:gd name="csY1" fmla="*/ 569892 h 2472571"/>
+              <a:gd name="csX2" fmla="*/ 2282809 w 2456533"/>
+              <a:gd name="csY2" fmla="*/ 1870143 h 2472571"/>
+              <a:gd name="csX3" fmla="*/ 1124714 w 2456533"/>
+              <a:gd name="csY3" fmla="*/ 2468170 h 2472571"/>
+              <a:gd name="csX4" fmla="*/ 1228267 w 2456533"/>
+              <a:gd name="csY4" fmla="*/ 1236286 h 2472571"/>
+              <a:gd name="csX5" fmla="*/ 1086545 w 2456533"/>
+              <a:gd name="csY5" fmla="*/ 8257 h 2472571"/>
+              <a:gd name="csX0" fmla="*/ 1086545 w 2456533"/>
+              <a:gd name="csY0" fmla="*/ 8257 h 2472571"/>
+              <a:gd name="csX1" fmla="*/ 2262820 w 2456533"/>
+              <a:gd name="csY1" fmla="*/ 569892 h 2472571"/>
+              <a:gd name="csX2" fmla="*/ 2282809 w 2456533"/>
+              <a:gd name="csY2" fmla="*/ 1870143 h 2472571"/>
+              <a:gd name="csX3" fmla="*/ 1124714 w 2456533"/>
+              <a:gd name="csY3" fmla="*/ 2468170 h 2472571"/>
             </a:gdLst>
             <a:ahLst/>
             <a:cxnLst>
               <a:cxn ang="0">
-                <a:pos x="connsiteX0" y="connsiteY0"/>
+                <a:pos x="csX0" y="csY0"/>
               </a:cxn>
               <a:cxn ang="0">
-                <a:pos x="connsiteX1" y="connsiteY1"/>
+                <a:pos x="csX1" y="csY1"/>
               </a:cxn>
               <a:cxn ang="0">
-                <a:pos x="connsiteX2" y="connsiteY2"/>
+                <a:pos x="csX2" y="csY2"/>
               </a:cxn>
               <a:cxn ang="0">
-                <a:pos x="connsiteX3" y="connsiteY3"/>
+                <a:pos x="csX3" y="csY3"/>
               </a:cxn>
             </a:cxnLst>
             <a:rect l="l" t="t" r="r" b="b"/>
@@ -37840,40 +37840,40 @@
           <a:custGeom>
             <a:avLst/>
             <a:gdLst>
-              <a:gd name="connsiteX0" fmla="*/ 1138739 w 2456533"/>
-              <a:gd name="connsiteY0" fmla="*/ 2069 h 1555671"/>
-              <a:gd name="connsiteX1" fmla="*/ 2089369 w 2456533"/>
-              <a:gd name="connsiteY1" fmla="*/ 223168 h 1555671"/>
-              <a:gd name="connsiteX2" fmla="*/ 2119140 w 2456533"/>
-              <a:gd name="connsiteY2" fmla="*/ 1313316 h 1555671"/>
-              <a:gd name="connsiteX3" fmla="*/ 1162974 w 2456533"/>
-              <a:gd name="connsiteY3" fmla="*/ 1554572 h 1555671"/>
-              <a:gd name="connsiteX4" fmla="*/ 1228267 w 2456533"/>
-              <a:gd name="connsiteY4" fmla="*/ 777836 h 1555671"/>
-              <a:gd name="connsiteX5" fmla="*/ 1138739 w 2456533"/>
-              <a:gd name="connsiteY5" fmla="*/ 2069 h 1555671"/>
-              <a:gd name="connsiteX0" fmla="*/ 1138739 w 2456533"/>
-              <a:gd name="connsiteY0" fmla="*/ 2069 h 1555671"/>
-              <a:gd name="connsiteX1" fmla="*/ 2089369 w 2456533"/>
-              <a:gd name="connsiteY1" fmla="*/ 223168 h 1555671"/>
-              <a:gd name="connsiteX2" fmla="*/ 2119140 w 2456533"/>
-              <a:gd name="connsiteY2" fmla="*/ 1313316 h 1555671"/>
-              <a:gd name="connsiteX3" fmla="*/ 1162974 w 2456533"/>
-              <a:gd name="connsiteY3" fmla="*/ 1554572 h 1555671"/>
+              <a:gd name="csX0" fmla="*/ 1138739 w 2456533"/>
+              <a:gd name="csY0" fmla="*/ 2069 h 1555671"/>
+              <a:gd name="csX1" fmla="*/ 2089369 w 2456533"/>
+              <a:gd name="csY1" fmla="*/ 223168 h 1555671"/>
+              <a:gd name="csX2" fmla="*/ 2119140 w 2456533"/>
+              <a:gd name="csY2" fmla="*/ 1313316 h 1555671"/>
+              <a:gd name="csX3" fmla="*/ 1162974 w 2456533"/>
+              <a:gd name="csY3" fmla="*/ 1554572 h 1555671"/>
+              <a:gd name="csX4" fmla="*/ 1228267 w 2456533"/>
+              <a:gd name="csY4" fmla="*/ 777836 h 1555671"/>
+              <a:gd name="csX5" fmla="*/ 1138739 w 2456533"/>
+              <a:gd name="csY5" fmla="*/ 2069 h 1555671"/>
+              <a:gd name="csX0" fmla="*/ 1138739 w 2456533"/>
+              <a:gd name="csY0" fmla="*/ 2069 h 1555671"/>
+              <a:gd name="csX1" fmla="*/ 2089369 w 2456533"/>
+              <a:gd name="csY1" fmla="*/ 223168 h 1555671"/>
+              <a:gd name="csX2" fmla="*/ 2119140 w 2456533"/>
+              <a:gd name="csY2" fmla="*/ 1313316 h 1555671"/>
+              <a:gd name="csX3" fmla="*/ 1162974 w 2456533"/>
+              <a:gd name="csY3" fmla="*/ 1554572 h 1555671"/>
             </a:gdLst>
             <a:ahLst/>
             <a:cxnLst>
               <a:cxn ang="0">
-                <a:pos x="connsiteX0" y="connsiteY0"/>
+                <a:pos x="csX0" y="csY0"/>
               </a:cxn>
               <a:cxn ang="0">
-                <a:pos x="connsiteX1" y="connsiteY1"/>
+                <a:pos x="csX1" y="csY1"/>
               </a:cxn>
               <a:cxn ang="0">
-                <a:pos x="connsiteX2" y="connsiteY2"/>
+                <a:pos x="csX2" y="csY2"/>
               </a:cxn>
               <a:cxn ang="0">
-                <a:pos x="connsiteX3" y="connsiteY3"/>
+                <a:pos x="csX3" y="csY3"/>
               </a:cxn>
             </a:cxnLst>
             <a:rect l="l" t="t" r="r" b="b"/>
@@ -42702,28 +42702,28 @@
           <a:custGeom>
             <a:avLst/>
             <a:gdLst>
-              <a:gd name="connsiteX0" fmla="*/ 0 w 1309967"/>
-              <a:gd name="connsiteY0" fmla="*/ 1166137 h 1166137"/>
-              <a:gd name="connsiteX1" fmla="*/ 756619 w 1309967"/>
-              <a:gd name="connsiteY1" fmla="*/ 857848 h 1166137"/>
-              <a:gd name="connsiteX2" fmla="*/ 1309967 w 1309967"/>
-              <a:gd name="connsiteY2" fmla="*/ 0 h 1166137"/>
-              <a:gd name="connsiteX3" fmla="*/ 1309967 w 1309967"/>
-              <a:gd name="connsiteY3" fmla="*/ 0 h 1166137"/>
+              <a:gd name="csX0" fmla="*/ 0 w 1309967"/>
+              <a:gd name="csY0" fmla="*/ 1166137 h 1166137"/>
+              <a:gd name="csX1" fmla="*/ 756619 w 1309967"/>
+              <a:gd name="csY1" fmla="*/ 857848 h 1166137"/>
+              <a:gd name="csX2" fmla="*/ 1309967 w 1309967"/>
+              <a:gd name="csY2" fmla="*/ 0 h 1166137"/>
+              <a:gd name="csX3" fmla="*/ 1309967 w 1309967"/>
+              <a:gd name="csY3" fmla="*/ 0 h 1166137"/>
             </a:gdLst>
             <a:ahLst/>
             <a:cxnLst>
               <a:cxn ang="0">
-                <a:pos x="connsiteX0" y="connsiteY0"/>
+                <a:pos x="csX0" y="csY0"/>
               </a:cxn>
               <a:cxn ang="0">
-                <a:pos x="connsiteX1" y="connsiteY1"/>
+                <a:pos x="csX1" y="csY1"/>
               </a:cxn>
               <a:cxn ang="0">
-                <a:pos x="connsiteX2" y="connsiteY2"/>
+                <a:pos x="csX2" y="csY2"/>
               </a:cxn>
               <a:cxn ang="0">
-                <a:pos x="connsiteX3" y="connsiteY3"/>
+                <a:pos x="csX3" y="csY3"/>
               </a:cxn>
             </a:cxnLst>
             <a:rect l="l" t="t" r="r" b="b"/>
@@ -43669,28 +43669,28 @@
           <a:custGeom>
             <a:avLst/>
             <a:gdLst>
-              <a:gd name="connsiteX0" fmla="*/ 0 w 1987164"/>
-              <a:gd name="connsiteY0" fmla="*/ 981635 h 981635"/>
-              <a:gd name="connsiteX1" fmla="*/ 1147759 w 1987164"/>
-              <a:gd name="connsiteY1" fmla="*/ 722122 h 981635"/>
-              <a:gd name="connsiteX2" fmla="*/ 1987164 w 1987164"/>
-              <a:gd name="connsiteY2" fmla="*/ 0 h 981635"/>
-              <a:gd name="connsiteX3" fmla="*/ 1987164 w 1987164"/>
-              <a:gd name="connsiteY3" fmla="*/ 0 h 981635"/>
+              <a:gd name="csX0" fmla="*/ 0 w 1987164"/>
+              <a:gd name="csY0" fmla="*/ 981635 h 981635"/>
+              <a:gd name="csX1" fmla="*/ 1147759 w 1987164"/>
+              <a:gd name="csY1" fmla="*/ 722122 h 981635"/>
+              <a:gd name="csX2" fmla="*/ 1987164 w 1987164"/>
+              <a:gd name="csY2" fmla="*/ 0 h 981635"/>
+              <a:gd name="csX3" fmla="*/ 1987164 w 1987164"/>
+              <a:gd name="csY3" fmla="*/ 0 h 981635"/>
             </a:gdLst>
             <a:ahLst/>
             <a:cxnLst>
               <a:cxn ang="0">
-                <a:pos x="connsiteX0" y="connsiteY0"/>
+                <a:pos x="csX0" y="csY0"/>
               </a:cxn>
               <a:cxn ang="0">
-                <a:pos x="connsiteX1" y="connsiteY1"/>
+                <a:pos x="csX1" y="csY1"/>
               </a:cxn>
               <a:cxn ang="0">
-                <a:pos x="connsiteX2" y="connsiteY2"/>
+                <a:pos x="csX2" y="csY2"/>
               </a:cxn>
               <a:cxn ang="0">
-                <a:pos x="connsiteX3" y="connsiteY3"/>
+                <a:pos x="csX3" y="csY3"/>
               </a:cxn>
             </a:cxnLst>
             <a:rect l="l" t="t" r="r" b="b"/>
